--- a/Lectures/Chunk 5 - Loops.pptx
+++ b/Lectures/Chunk 5 - Loops.pptx
@@ -132,6 +132,99 @@
 
 <file path=ppt/changesInfos/changesInfo1.xml><?xml version="1.0" encoding="utf-8"?>
 <pc:chgInfo xmlns:a="http://schemas.openxmlformats.org/drawingml/2006/main" xmlns:r="http://schemas.openxmlformats.org/officeDocument/2006/relationships" xmlns:ac="http://schemas.microsoft.com/office/drawing/2013/main/command" xmlns:pc="http://schemas.microsoft.com/office/powerpoint/2013/main/command">
+  <pc:docChgLst>
+    <pc:chgData name="Jonathan Bollig" userId="8b5d0afe-f106-45e0-8c3f-fd98fa124db1" providerId="ADAL" clId="{891409C9-2319-433B-8001-2E1CE368518E}"/>
+    <pc:docChg chg="custSel addSld delSld modSld">
+      <pc:chgData name="Jonathan Bollig" userId="8b5d0afe-f106-45e0-8c3f-fd98fa124db1" providerId="ADAL" clId="{891409C9-2319-433B-8001-2E1CE368518E}" dt="2025-08-18T13:33:56.347" v="46" actId="47"/>
+      <pc:docMkLst>
+        <pc:docMk/>
+      </pc:docMkLst>
+      <pc:sldChg chg="modSp mod">
+        <pc:chgData name="Jonathan Bollig" userId="8b5d0afe-f106-45e0-8c3f-fd98fa124db1" providerId="ADAL" clId="{891409C9-2319-433B-8001-2E1CE368518E}" dt="2025-08-18T10:03:07.320" v="7" actId="20577"/>
+        <pc:sldMkLst>
+          <pc:docMk/>
+          <pc:sldMk cId="836289018" sldId="256"/>
+        </pc:sldMkLst>
+      </pc:sldChg>
+      <pc:sldChg chg="del">
+        <pc:chgData name="Jonathan Bollig" userId="8b5d0afe-f106-45e0-8c3f-fd98fa124db1" providerId="ADAL" clId="{891409C9-2319-433B-8001-2E1CE368518E}" dt="2025-08-18T09:57:07.527" v="0" actId="47"/>
+        <pc:sldMkLst>
+          <pc:docMk/>
+          <pc:sldMk cId="3656329933" sldId="257"/>
+        </pc:sldMkLst>
+      </pc:sldChg>
+      <pc:sldChg chg="del">
+        <pc:chgData name="Jonathan Bollig" userId="8b5d0afe-f106-45e0-8c3f-fd98fa124db1" providerId="ADAL" clId="{891409C9-2319-433B-8001-2E1CE368518E}" dt="2025-08-18T09:57:07.527" v="0" actId="47"/>
+        <pc:sldMkLst>
+          <pc:docMk/>
+          <pc:sldMk cId="544279955" sldId="258"/>
+        </pc:sldMkLst>
+      </pc:sldChg>
+      <pc:sldChg chg="delSp modSp del mod">
+        <pc:chgData name="Jonathan Bollig" userId="8b5d0afe-f106-45e0-8c3f-fd98fa124db1" providerId="ADAL" clId="{891409C9-2319-433B-8001-2E1CE368518E}" dt="2025-08-18T13:33:56.347" v="46" actId="47"/>
+        <pc:sldMkLst>
+          <pc:docMk/>
+          <pc:sldMk cId="2169503629" sldId="259"/>
+        </pc:sldMkLst>
+      </pc:sldChg>
+      <pc:sldChg chg="add">
+        <pc:chgData name="Jonathan Bollig" userId="8b5d0afe-f106-45e0-8c3f-fd98fa124db1" providerId="ADAL" clId="{891409C9-2319-433B-8001-2E1CE368518E}" dt="2025-08-18T13:33:54.473" v="45"/>
+        <pc:sldMkLst>
+          <pc:docMk/>
+          <pc:sldMk cId="932306145" sldId="260"/>
+        </pc:sldMkLst>
+      </pc:sldChg>
+      <pc:sldChg chg="del">
+        <pc:chgData name="Jonathan Bollig" userId="8b5d0afe-f106-45e0-8c3f-fd98fa124db1" providerId="ADAL" clId="{891409C9-2319-433B-8001-2E1CE368518E}" dt="2025-08-18T09:57:07.527" v="0" actId="47"/>
+        <pc:sldMkLst>
+          <pc:docMk/>
+          <pc:sldMk cId="2533283895" sldId="260"/>
+        </pc:sldMkLst>
+      </pc:sldChg>
+      <pc:sldChg chg="del">
+        <pc:chgData name="Jonathan Bollig" userId="8b5d0afe-f106-45e0-8c3f-fd98fa124db1" providerId="ADAL" clId="{891409C9-2319-433B-8001-2E1CE368518E}" dt="2025-08-18T09:57:07.527" v="0" actId="47"/>
+        <pc:sldMkLst>
+          <pc:docMk/>
+          <pc:sldMk cId="847849653" sldId="261"/>
+        </pc:sldMkLst>
+      </pc:sldChg>
+      <pc:sldChg chg="del">
+        <pc:chgData name="Jonathan Bollig" userId="8b5d0afe-f106-45e0-8c3f-fd98fa124db1" providerId="ADAL" clId="{891409C9-2319-433B-8001-2E1CE368518E}" dt="2025-08-18T09:57:07.527" v="0" actId="47"/>
+        <pc:sldMkLst>
+          <pc:docMk/>
+          <pc:sldMk cId="1908144578" sldId="262"/>
+        </pc:sldMkLst>
+      </pc:sldChg>
+      <pc:sldChg chg="del">
+        <pc:chgData name="Jonathan Bollig" userId="8b5d0afe-f106-45e0-8c3f-fd98fa124db1" providerId="ADAL" clId="{891409C9-2319-433B-8001-2E1CE368518E}" dt="2025-08-18T09:57:07.527" v="0" actId="47"/>
+        <pc:sldMkLst>
+          <pc:docMk/>
+          <pc:sldMk cId="4076698392" sldId="263"/>
+        </pc:sldMkLst>
+      </pc:sldChg>
+      <pc:sldChg chg="del">
+        <pc:chgData name="Jonathan Bollig" userId="8b5d0afe-f106-45e0-8c3f-fd98fa124db1" providerId="ADAL" clId="{891409C9-2319-433B-8001-2E1CE368518E}" dt="2025-08-18T09:57:07.527" v="0" actId="47"/>
+        <pc:sldMkLst>
+          <pc:docMk/>
+          <pc:sldMk cId="3708449378" sldId="264"/>
+        </pc:sldMkLst>
+      </pc:sldChg>
+      <pc:sldChg chg="del">
+        <pc:chgData name="Jonathan Bollig" userId="8b5d0afe-f106-45e0-8c3f-fd98fa124db1" providerId="ADAL" clId="{891409C9-2319-433B-8001-2E1CE368518E}" dt="2025-08-18T09:57:07.527" v="0" actId="47"/>
+        <pc:sldMkLst>
+          <pc:docMk/>
+          <pc:sldMk cId="933916611" sldId="265"/>
+        </pc:sldMkLst>
+      </pc:sldChg>
+      <pc:sldChg chg="del">
+        <pc:chgData name="Jonathan Bollig" userId="8b5d0afe-f106-45e0-8c3f-fd98fa124db1" providerId="ADAL" clId="{891409C9-2319-433B-8001-2E1CE368518E}" dt="2025-08-18T09:57:07.527" v="0" actId="47"/>
+        <pc:sldMkLst>
+          <pc:docMk/>
+          <pc:sldMk cId="2117799034" sldId="266"/>
+        </pc:sldMkLst>
+      </pc:sldChg>
+    </pc:docChg>
+  </pc:docChgLst>
   <pc:docChgLst>
     <pc:chgData name="Jonathan Bollig" userId="8b5d0afe-f106-45e0-8c3f-fd98fa124db1" providerId="ADAL" clId="{B108959E-8160-4214-BA0D-42D2F1070C03}"/>
     <pc:docChg chg="undo custSel addSld modSld sldOrd">
@@ -800,99 +893,6 @@
       </pc:sldChg>
     </pc:docChg>
   </pc:docChgLst>
-  <pc:docChgLst>
-    <pc:chgData name="Jonathan Bollig" userId="8b5d0afe-f106-45e0-8c3f-fd98fa124db1" providerId="ADAL" clId="{891409C9-2319-433B-8001-2E1CE368518E}"/>
-    <pc:docChg chg="custSel addSld delSld modSld">
-      <pc:chgData name="Jonathan Bollig" userId="8b5d0afe-f106-45e0-8c3f-fd98fa124db1" providerId="ADAL" clId="{891409C9-2319-433B-8001-2E1CE368518E}" dt="2025-08-18T13:33:56.347" v="46" actId="47"/>
-      <pc:docMkLst>
-        <pc:docMk/>
-      </pc:docMkLst>
-      <pc:sldChg chg="modSp mod">
-        <pc:chgData name="Jonathan Bollig" userId="8b5d0afe-f106-45e0-8c3f-fd98fa124db1" providerId="ADAL" clId="{891409C9-2319-433B-8001-2E1CE368518E}" dt="2025-08-18T10:03:07.320" v="7" actId="20577"/>
-        <pc:sldMkLst>
-          <pc:docMk/>
-          <pc:sldMk cId="836289018" sldId="256"/>
-        </pc:sldMkLst>
-      </pc:sldChg>
-      <pc:sldChg chg="del">
-        <pc:chgData name="Jonathan Bollig" userId="8b5d0afe-f106-45e0-8c3f-fd98fa124db1" providerId="ADAL" clId="{891409C9-2319-433B-8001-2E1CE368518E}" dt="2025-08-18T09:57:07.527" v="0" actId="47"/>
-        <pc:sldMkLst>
-          <pc:docMk/>
-          <pc:sldMk cId="3656329933" sldId="257"/>
-        </pc:sldMkLst>
-      </pc:sldChg>
-      <pc:sldChg chg="del">
-        <pc:chgData name="Jonathan Bollig" userId="8b5d0afe-f106-45e0-8c3f-fd98fa124db1" providerId="ADAL" clId="{891409C9-2319-433B-8001-2E1CE368518E}" dt="2025-08-18T09:57:07.527" v="0" actId="47"/>
-        <pc:sldMkLst>
-          <pc:docMk/>
-          <pc:sldMk cId="544279955" sldId="258"/>
-        </pc:sldMkLst>
-      </pc:sldChg>
-      <pc:sldChg chg="delSp modSp del mod">
-        <pc:chgData name="Jonathan Bollig" userId="8b5d0afe-f106-45e0-8c3f-fd98fa124db1" providerId="ADAL" clId="{891409C9-2319-433B-8001-2E1CE368518E}" dt="2025-08-18T13:33:56.347" v="46" actId="47"/>
-        <pc:sldMkLst>
-          <pc:docMk/>
-          <pc:sldMk cId="2169503629" sldId="259"/>
-        </pc:sldMkLst>
-      </pc:sldChg>
-      <pc:sldChg chg="add">
-        <pc:chgData name="Jonathan Bollig" userId="8b5d0afe-f106-45e0-8c3f-fd98fa124db1" providerId="ADAL" clId="{891409C9-2319-433B-8001-2E1CE368518E}" dt="2025-08-18T13:33:54.473" v="45"/>
-        <pc:sldMkLst>
-          <pc:docMk/>
-          <pc:sldMk cId="932306145" sldId="260"/>
-        </pc:sldMkLst>
-      </pc:sldChg>
-      <pc:sldChg chg="del">
-        <pc:chgData name="Jonathan Bollig" userId="8b5d0afe-f106-45e0-8c3f-fd98fa124db1" providerId="ADAL" clId="{891409C9-2319-433B-8001-2E1CE368518E}" dt="2025-08-18T09:57:07.527" v="0" actId="47"/>
-        <pc:sldMkLst>
-          <pc:docMk/>
-          <pc:sldMk cId="2533283895" sldId="260"/>
-        </pc:sldMkLst>
-      </pc:sldChg>
-      <pc:sldChg chg="del">
-        <pc:chgData name="Jonathan Bollig" userId="8b5d0afe-f106-45e0-8c3f-fd98fa124db1" providerId="ADAL" clId="{891409C9-2319-433B-8001-2E1CE368518E}" dt="2025-08-18T09:57:07.527" v="0" actId="47"/>
-        <pc:sldMkLst>
-          <pc:docMk/>
-          <pc:sldMk cId="847849653" sldId="261"/>
-        </pc:sldMkLst>
-      </pc:sldChg>
-      <pc:sldChg chg="del">
-        <pc:chgData name="Jonathan Bollig" userId="8b5d0afe-f106-45e0-8c3f-fd98fa124db1" providerId="ADAL" clId="{891409C9-2319-433B-8001-2E1CE368518E}" dt="2025-08-18T09:57:07.527" v="0" actId="47"/>
-        <pc:sldMkLst>
-          <pc:docMk/>
-          <pc:sldMk cId="1908144578" sldId="262"/>
-        </pc:sldMkLst>
-      </pc:sldChg>
-      <pc:sldChg chg="del">
-        <pc:chgData name="Jonathan Bollig" userId="8b5d0afe-f106-45e0-8c3f-fd98fa124db1" providerId="ADAL" clId="{891409C9-2319-433B-8001-2E1CE368518E}" dt="2025-08-18T09:57:07.527" v="0" actId="47"/>
-        <pc:sldMkLst>
-          <pc:docMk/>
-          <pc:sldMk cId="4076698392" sldId="263"/>
-        </pc:sldMkLst>
-      </pc:sldChg>
-      <pc:sldChg chg="del">
-        <pc:chgData name="Jonathan Bollig" userId="8b5d0afe-f106-45e0-8c3f-fd98fa124db1" providerId="ADAL" clId="{891409C9-2319-433B-8001-2E1CE368518E}" dt="2025-08-18T09:57:07.527" v="0" actId="47"/>
-        <pc:sldMkLst>
-          <pc:docMk/>
-          <pc:sldMk cId="3708449378" sldId="264"/>
-        </pc:sldMkLst>
-      </pc:sldChg>
-      <pc:sldChg chg="del">
-        <pc:chgData name="Jonathan Bollig" userId="8b5d0afe-f106-45e0-8c3f-fd98fa124db1" providerId="ADAL" clId="{891409C9-2319-433B-8001-2E1CE368518E}" dt="2025-08-18T09:57:07.527" v="0" actId="47"/>
-        <pc:sldMkLst>
-          <pc:docMk/>
-          <pc:sldMk cId="933916611" sldId="265"/>
-        </pc:sldMkLst>
-      </pc:sldChg>
-      <pc:sldChg chg="del">
-        <pc:chgData name="Jonathan Bollig" userId="8b5d0afe-f106-45e0-8c3f-fd98fa124db1" providerId="ADAL" clId="{891409C9-2319-433B-8001-2E1CE368518E}" dt="2025-08-18T09:57:07.527" v="0" actId="47"/>
-        <pc:sldMkLst>
-          <pc:docMk/>
-          <pc:sldMk cId="2117799034" sldId="266"/>
-        </pc:sldMkLst>
-      </pc:sldChg>
-    </pc:docChg>
-  </pc:docChgLst>
 </pc:chgInfo>
 </file>
 
@@ -1086,7 +1086,7 @@
           <a:p>
             <a:fld id="{0B6CA2EE-5589-4682-AD7F-744DBF1E81F5}" type="datetimeFigureOut">
               <a:rPr lang="de-DE" smtClean="0"/>
-              <a:t>04.10.2025</a:t>
+              <a:t>07.10.2025</a:t>
             </a:fld>
             <a:endParaRPr lang="de-DE"/>
           </a:p>
@@ -1244,7 +1244,7 @@
           <a:p>
             <a:fld id="{11422C3B-6429-4381-8F08-B422F3CD22BF}" type="slidenum">
               <a:rPr lang="de-DE" smtClean="0"/>
-              <a:t>‹Nr.›</a:t>
+              <a:t>‹#›</a:t>
             </a:fld>
             <a:endParaRPr lang="de-DE"/>
           </a:p>
@@ -1353,6 +1353,90 @@
 </p:notesMaster>
 </file>
 
+<file path=ppt/notesSlides/notesSlide1.xml><?xml version="1.0" encoding="utf-8"?>
+<p:notes xmlns:a="http://schemas.openxmlformats.org/drawingml/2006/main" xmlns:r="http://schemas.openxmlformats.org/officeDocument/2006/relationships" xmlns:p="http://schemas.openxmlformats.org/presentationml/2006/main">
+  <p:cSld>
+    <p:spTree>
+      <p:nvGrpSpPr>
+        <p:cNvPr id="1" name=""/>
+        <p:cNvGrpSpPr/>
+        <p:nvPr/>
+      </p:nvGrpSpPr>
+      <p:grpSpPr>
+        <a:xfrm>
+          <a:off x="0" y="0"/>
+          <a:ext cx="0" cy="0"/>
+          <a:chOff x="0" y="0"/>
+          <a:chExt cx="0" cy="0"/>
+        </a:xfrm>
+      </p:grpSpPr>
+      <p:sp>
+        <p:nvSpPr>
+          <p:cNvPr id="2" name="Slide Image Placeholder 1"/>
+          <p:cNvSpPr>
+            <a:spLocks noGrp="1" noRot="1" noChangeAspect="1"/>
+          </p:cNvSpPr>
+          <p:nvPr>
+            <p:ph type="sldImg"/>
+          </p:nvPr>
+        </p:nvSpPr>
+        <p:spPr/>
+      </p:sp>
+      <p:sp>
+        <p:nvSpPr>
+          <p:cNvPr id="3" name="Notes Placeholder 2"/>
+          <p:cNvSpPr>
+            <a:spLocks noGrp="1"/>
+          </p:cNvSpPr>
+          <p:nvPr>
+            <p:ph type="body" idx="1"/>
+          </p:nvPr>
+        </p:nvSpPr>
+        <p:spPr/>
+        <p:txBody>
+          <a:bodyPr/>
+          <a:lstStyle/>
+          <a:p>
+            <a:endParaRPr lang="de-DE" dirty="0"/>
+          </a:p>
+        </p:txBody>
+      </p:sp>
+      <p:sp>
+        <p:nvSpPr>
+          <p:cNvPr id="4" name="Slide Number Placeholder 3"/>
+          <p:cNvSpPr>
+            <a:spLocks noGrp="1"/>
+          </p:cNvSpPr>
+          <p:nvPr>
+            <p:ph type="sldNum" sz="quarter" idx="5"/>
+          </p:nvPr>
+        </p:nvSpPr>
+        <p:spPr/>
+        <p:txBody>
+          <a:bodyPr/>
+          <a:lstStyle/>
+          <a:p>
+            <a:fld id="{11422C3B-6429-4381-8F08-B422F3CD22BF}" type="slidenum">
+              <a:rPr lang="de-DE" smtClean="0"/>
+              <a:t>2</a:t>
+            </a:fld>
+            <a:endParaRPr lang="de-DE"/>
+          </a:p>
+        </p:txBody>
+      </p:sp>
+    </p:spTree>
+    <p:extLst>
+      <p:ext uri="{BB962C8B-B14F-4D97-AF65-F5344CB8AC3E}">
+        <p14:creationId xmlns:p14="http://schemas.microsoft.com/office/powerpoint/2010/main" val="2259543958"/>
+      </p:ext>
+    </p:extLst>
+  </p:cSld>
+  <p:clrMapOvr>
+    <a:masterClrMapping/>
+  </p:clrMapOvr>
+</p:notes>
+</file>
+
 <file path=ppt/slideLayouts/slideLayout1.xml><?xml version="1.0" encoding="utf-8"?>
 <p:sldLayout xmlns:a="http://schemas.openxmlformats.org/drawingml/2006/main" xmlns:r="http://schemas.openxmlformats.org/officeDocument/2006/relationships" xmlns:p="http://schemas.openxmlformats.org/presentationml/2006/main" type="title" preserve="1">
   <p:cSld name="Titelfolie">
@@ -1500,7 +1584,7 @@
           <a:p>
             <a:fld id="{ADA51F25-4808-47F4-BF6E-BCDC230DB01C}" type="datetimeFigureOut">
               <a:rPr lang="de-DE" smtClean="0"/>
-              <a:t>04.10.2025</a:t>
+              <a:t>07.10.2025</a:t>
             </a:fld>
             <a:endParaRPr lang="de-DE"/>
           </a:p>
@@ -1554,7 +1638,7 @@
           <a:p>
             <a:fld id="{C018A060-D51C-4243-8F88-61D66D5570B8}" type="slidenum">
               <a:rPr lang="de-DE" smtClean="0"/>
-              <a:t>‹Nr.›</a:t>
+              <a:t>‹#›</a:t>
             </a:fld>
             <a:endParaRPr lang="de-DE"/>
           </a:p>
@@ -1698,7 +1782,7 @@
           <a:p>
             <a:fld id="{ADA51F25-4808-47F4-BF6E-BCDC230DB01C}" type="datetimeFigureOut">
               <a:rPr lang="de-DE" smtClean="0"/>
-              <a:t>04.10.2025</a:t>
+              <a:t>07.10.2025</a:t>
             </a:fld>
             <a:endParaRPr lang="de-DE"/>
           </a:p>
@@ -1752,7 +1836,7 @@
           <a:p>
             <a:fld id="{C018A060-D51C-4243-8F88-61D66D5570B8}" type="slidenum">
               <a:rPr lang="de-DE" smtClean="0"/>
-              <a:t>‹Nr.›</a:t>
+              <a:t>‹#›</a:t>
             </a:fld>
             <a:endParaRPr lang="de-DE"/>
           </a:p>
@@ -1906,7 +1990,7 @@
           <a:p>
             <a:fld id="{ADA51F25-4808-47F4-BF6E-BCDC230DB01C}" type="datetimeFigureOut">
               <a:rPr lang="de-DE" smtClean="0"/>
-              <a:t>04.10.2025</a:t>
+              <a:t>07.10.2025</a:t>
             </a:fld>
             <a:endParaRPr lang="de-DE"/>
           </a:p>
@@ -1960,7 +2044,7 @@
           <a:p>
             <a:fld id="{C018A060-D51C-4243-8F88-61D66D5570B8}" type="slidenum">
               <a:rPr lang="de-DE" smtClean="0"/>
-              <a:t>‹Nr.›</a:t>
+              <a:t>‹#›</a:t>
             </a:fld>
             <a:endParaRPr lang="de-DE"/>
           </a:p>
@@ -2104,7 +2188,7 @@
           <a:p>
             <a:fld id="{ADA51F25-4808-47F4-BF6E-BCDC230DB01C}" type="datetimeFigureOut">
               <a:rPr lang="de-DE" smtClean="0"/>
-              <a:t>04.10.2025</a:t>
+              <a:t>07.10.2025</a:t>
             </a:fld>
             <a:endParaRPr lang="de-DE"/>
           </a:p>
@@ -2158,7 +2242,7 @@
           <a:p>
             <a:fld id="{C018A060-D51C-4243-8F88-61D66D5570B8}" type="slidenum">
               <a:rPr lang="de-DE" smtClean="0"/>
-              <a:t>‹Nr.›</a:t>
+              <a:t>‹#›</a:t>
             </a:fld>
             <a:endParaRPr lang="de-DE"/>
           </a:p>
@@ -2379,7 +2463,7 @@
           <a:p>
             <a:fld id="{ADA51F25-4808-47F4-BF6E-BCDC230DB01C}" type="datetimeFigureOut">
               <a:rPr lang="de-DE" smtClean="0"/>
-              <a:t>04.10.2025</a:t>
+              <a:t>07.10.2025</a:t>
             </a:fld>
             <a:endParaRPr lang="de-DE"/>
           </a:p>
@@ -2433,7 +2517,7 @@
           <a:p>
             <a:fld id="{C018A060-D51C-4243-8F88-61D66D5570B8}" type="slidenum">
               <a:rPr lang="de-DE" smtClean="0"/>
-              <a:t>‹Nr.›</a:t>
+              <a:t>‹#›</a:t>
             </a:fld>
             <a:endParaRPr lang="de-DE"/>
           </a:p>
@@ -2644,7 +2728,7 @@
           <a:p>
             <a:fld id="{ADA51F25-4808-47F4-BF6E-BCDC230DB01C}" type="datetimeFigureOut">
               <a:rPr lang="de-DE" smtClean="0"/>
-              <a:t>04.10.2025</a:t>
+              <a:t>07.10.2025</a:t>
             </a:fld>
             <a:endParaRPr lang="de-DE"/>
           </a:p>
@@ -2698,7 +2782,7 @@
           <a:p>
             <a:fld id="{C018A060-D51C-4243-8F88-61D66D5570B8}" type="slidenum">
               <a:rPr lang="de-DE" smtClean="0"/>
-              <a:t>‹Nr.›</a:t>
+              <a:t>‹#›</a:t>
             </a:fld>
             <a:endParaRPr lang="de-DE"/>
           </a:p>
@@ -3056,7 +3140,7 @@
           <a:p>
             <a:fld id="{ADA51F25-4808-47F4-BF6E-BCDC230DB01C}" type="datetimeFigureOut">
               <a:rPr lang="de-DE" smtClean="0"/>
-              <a:t>04.10.2025</a:t>
+              <a:t>07.10.2025</a:t>
             </a:fld>
             <a:endParaRPr lang="de-DE"/>
           </a:p>
@@ -3110,7 +3194,7 @@
           <a:p>
             <a:fld id="{C018A060-D51C-4243-8F88-61D66D5570B8}" type="slidenum">
               <a:rPr lang="de-DE" smtClean="0"/>
-              <a:t>‹Nr.›</a:t>
+              <a:t>‹#›</a:t>
             </a:fld>
             <a:endParaRPr lang="de-DE"/>
           </a:p>
@@ -3197,7 +3281,7 @@
           <a:p>
             <a:fld id="{ADA51F25-4808-47F4-BF6E-BCDC230DB01C}" type="datetimeFigureOut">
               <a:rPr lang="de-DE" smtClean="0"/>
-              <a:t>04.10.2025</a:t>
+              <a:t>07.10.2025</a:t>
             </a:fld>
             <a:endParaRPr lang="de-DE"/>
           </a:p>
@@ -3251,7 +3335,7 @@
           <a:p>
             <a:fld id="{C018A060-D51C-4243-8F88-61D66D5570B8}" type="slidenum">
               <a:rPr lang="de-DE" smtClean="0"/>
-              <a:t>‹Nr.›</a:t>
+              <a:t>‹#›</a:t>
             </a:fld>
             <a:endParaRPr lang="de-DE"/>
           </a:p>
@@ -3310,7 +3394,7 @@
           <a:p>
             <a:fld id="{ADA51F25-4808-47F4-BF6E-BCDC230DB01C}" type="datetimeFigureOut">
               <a:rPr lang="de-DE" smtClean="0"/>
-              <a:t>04.10.2025</a:t>
+              <a:t>07.10.2025</a:t>
             </a:fld>
             <a:endParaRPr lang="de-DE"/>
           </a:p>
@@ -3364,7 +3448,7 @@
           <a:p>
             <a:fld id="{C018A060-D51C-4243-8F88-61D66D5570B8}" type="slidenum">
               <a:rPr lang="de-DE" smtClean="0"/>
-              <a:t>‹Nr.›</a:t>
+              <a:t>‹#›</a:t>
             </a:fld>
             <a:endParaRPr lang="de-DE"/>
           </a:p>
@@ -3621,7 +3705,7 @@
           <a:p>
             <a:fld id="{ADA51F25-4808-47F4-BF6E-BCDC230DB01C}" type="datetimeFigureOut">
               <a:rPr lang="de-DE" smtClean="0"/>
-              <a:t>04.10.2025</a:t>
+              <a:t>07.10.2025</a:t>
             </a:fld>
             <a:endParaRPr lang="de-DE"/>
           </a:p>
@@ -3675,7 +3759,7 @@
           <a:p>
             <a:fld id="{C018A060-D51C-4243-8F88-61D66D5570B8}" type="slidenum">
               <a:rPr lang="de-DE" smtClean="0"/>
-              <a:t>‹Nr.›</a:t>
+              <a:t>‹#›</a:t>
             </a:fld>
             <a:endParaRPr lang="de-DE"/>
           </a:p>
@@ -3909,7 +3993,7 @@
           <a:p>
             <a:fld id="{ADA51F25-4808-47F4-BF6E-BCDC230DB01C}" type="datetimeFigureOut">
               <a:rPr lang="de-DE" smtClean="0"/>
-              <a:t>04.10.2025</a:t>
+              <a:t>07.10.2025</a:t>
             </a:fld>
             <a:endParaRPr lang="de-DE"/>
           </a:p>
@@ -3963,7 +4047,7 @@
           <a:p>
             <a:fld id="{C018A060-D51C-4243-8F88-61D66D5570B8}" type="slidenum">
               <a:rPr lang="de-DE" smtClean="0"/>
-              <a:t>‹Nr.›</a:t>
+              <a:t>‹#›</a:t>
             </a:fld>
             <a:endParaRPr lang="de-DE"/>
           </a:p>
@@ -4150,7 +4234,7 @@
           <a:p>
             <a:fld id="{ADA51F25-4808-47F4-BF6E-BCDC230DB01C}" type="datetimeFigureOut">
               <a:rPr lang="de-DE" smtClean="0"/>
-              <a:t>04.10.2025</a:t>
+              <a:t>07.10.2025</a:t>
             </a:fld>
             <a:endParaRPr lang="de-DE"/>
           </a:p>
@@ -4240,7 +4324,7 @@
           <a:p>
             <a:fld id="{C018A060-D51C-4243-8F88-61D66D5570B8}" type="slidenum">
               <a:rPr lang="de-DE" smtClean="0"/>
-              <a:t>‹Nr.›</a:t>
+              <a:t>‹#›</a:t>
             </a:fld>
             <a:endParaRPr lang="de-DE"/>
           </a:p>
@@ -4583,7 +4667,12 @@
             <p:ph type="ctrTitle"/>
           </p:nvPr>
         </p:nvSpPr>
-        <p:spPr/>
+        <p:spPr>
+          <a:xfrm>
+            <a:off x="1524000" y="1527477"/>
+            <a:ext cx="9144000" cy="2387600"/>
+          </a:xfrm>
+        </p:spPr>
         <p:txBody>
           <a:bodyPr>
             <a:normAutofit fontScale="90000"/>
@@ -4602,18 +4691,21 @@
               <a:t>(And everyone else!)</a:t>
             </a:r>
             <a:br>
+              <a:rPr lang="en-US" dirty="0"/>
+            </a:br>
+            <a:br>
               <a:rPr lang="en-US" noProof="0" dirty="0"/>
             </a:br>
             <a:r>
-              <a:rPr lang="en-US" noProof="0" dirty="0"/>
+              <a:rPr lang="en-US" b="1" noProof="0" dirty="0"/>
               <a:t>Chunk </a:t>
             </a:r>
             <a:r>
-              <a:rPr lang="en-US" dirty="0"/>
+              <a:rPr lang="en-US" b="1" dirty="0"/>
               <a:t>5</a:t>
             </a:r>
             <a:r>
-              <a:rPr lang="en-US" noProof="0" dirty="0"/>
+              <a:rPr lang="en-US" b="1" noProof="0" dirty="0"/>
               <a:t>: Loops</a:t>
             </a:r>
           </a:p>
@@ -4635,7 +4727,12 @@
             <p:ph type="subTitle" idx="1"/>
           </p:nvPr>
         </p:nvSpPr>
-        <p:spPr/>
+        <p:spPr>
+          <a:xfrm>
+            <a:off x="1524000" y="4502642"/>
+            <a:ext cx="9144000" cy="1655762"/>
+          </a:xfrm>
+        </p:spPr>
         <p:txBody>
           <a:bodyPr/>
           <a:lstStyle/>
@@ -4742,18 +4839,19 @@
               <a:rPr lang="en-US" dirty="0"/>
               <a:t>Problem without loops: Print every element in a list individually.</a:t>
             </a:r>
-          </a:p>
-          <a:p>
-            <a:endParaRPr lang="en-US" dirty="0"/>
-          </a:p>
-          <a:p>
-            <a:r>
-              <a:rPr lang="en-US" dirty="0"/>
-              <a:t>Easier way: for – loops:</a:t>
-            </a:r>
             <a:br>
               <a:rPr lang="en-US" dirty="0"/>
             </a:br>
+            <a:endParaRPr lang="en-US" dirty="0"/>
+          </a:p>
+          <a:p>
+            <a:r>
+              <a:rPr lang="en-US" dirty="0"/>
+              <a:t>Easier way: for – loops:</a:t>
+            </a:r>
+            <a:br>
+              <a:rPr lang="en-US" dirty="0"/>
+            </a:br>
             <a:r>
               <a:rPr lang="en-US" dirty="0"/>
               <a:t>Iterate through “</a:t>
@@ -4766,6 +4864,10 @@
               <a:rPr lang="en-US" dirty="0"/>
               <a:t>” object: Lists and Set (later more)</a:t>
             </a:r>
+            <a:br>
+              <a:rPr lang="en-US" dirty="0"/>
+            </a:br>
+            <a:endParaRPr lang="en-US" dirty="0"/>
           </a:p>
           <a:p>
             <a:r>
@@ -4790,7 +4892,7 @@
           <p:nvPr/>
         </p:nvPicPr>
         <p:blipFill>
-          <a:blip r:embed="rId2"/>
+          <a:blip r:embed="rId3"/>
           <a:stretch>
             <a:fillRect/>
           </a:stretch>
@@ -5164,7 +5266,7 @@
         </p:sp>
         <mc:AlternateContent xmlns:mc="http://schemas.openxmlformats.org/markup-compatibility/2006" xmlns:p14="http://schemas.microsoft.com/office/powerpoint/2010/main">
           <mc:Choice Requires="p14">
-            <p:contentPart p14:bwMode="auto" r:id="rId3">
+            <p:contentPart p14:bwMode="auto" r:id="rId4">
               <p14:nvContentPartPr>
                 <p14:cNvPr id="35" name="Freihand 34">
                   <a:extLst>
@@ -5196,7 +5298,7 @@
                 <p:nvPr/>
               </p:nvPicPr>
               <p:blipFill>
-                <a:blip r:embed="rId4"/>
+                <a:blip r:embed="rId5"/>
                 <a:stretch>
                   <a:fillRect/>
                 </a:stretch>
@@ -5328,7 +5430,7 @@
           <p:nvPr/>
         </p:nvPicPr>
         <p:blipFill>
-          <a:blip r:embed="rId5"/>
+          <a:blip r:embed="rId6"/>
           <a:stretch>
             <a:fillRect/>
           </a:stretch>
@@ -5579,6 +5681,495 @@
   <p:clrMapOvr>
     <a:masterClrMapping/>
   </p:clrMapOvr>
+  <p:timing>
+    <p:tnLst>
+      <p:par>
+        <p:cTn id="1" dur="indefinite" restart="never" nodeType="tmRoot">
+          <p:childTnLst>
+            <p:seq concurrent="1" nextAc="seek">
+              <p:cTn id="2" dur="indefinite" nodeType="mainSeq">
+                <p:childTnLst>
+                  <p:par>
+                    <p:cTn id="3" fill="hold">
+                      <p:stCondLst>
+                        <p:cond delay="indefinite"/>
+                      </p:stCondLst>
+                      <p:childTnLst>
+                        <p:par>
+                          <p:cTn id="4" fill="hold">
+                            <p:stCondLst>
+                              <p:cond delay="0"/>
+                            </p:stCondLst>
+                            <p:childTnLst>
+                              <p:par>
+                                <p:cTn id="5" presetID="1" presetClass="entr" presetSubtype="0" fill="hold" nodeType="clickEffect">
+                                  <p:stCondLst>
+                                    <p:cond delay="0"/>
+                                  </p:stCondLst>
+                                  <p:childTnLst>
+                                    <p:set>
+                                      <p:cBhvr>
+                                        <p:cTn id="6" dur="1" fill="hold">
+                                          <p:stCondLst>
+                                            <p:cond delay="0"/>
+                                          </p:stCondLst>
+                                        </p:cTn>
+                                        <p:tgtEl>
+                                          <p:spTgt spid="3">
+                                            <p:txEl>
+                                              <p:pRg st="1" end="1"/>
+                                            </p:txEl>
+                                          </p:spTgt>
+                                        </p:tgtEl>
+                                        <p:attrNameLst>
+                                          <p:attrName>style.visibility</p:attrName>
+                                        </p:attrNameLst>
+                                      </p:cBhvr>
+                                      <p:to>
+                                        <p:strVal val="visible"/>
+                                      </p:to>
+                                    </p:set>
+                                  </p:childTnLst>
+                                </p:cTn>
+                              </p:par>
+                              <p:par>
+                                <p:cTn id="7" presetID="1" presetClass="entr" presetSubtype="0" fill="hold" grpId="0" nodeType="withEffect">
+                                  <p:stCondLst>
+                                    <p:cond delay="0"/>
+                                  </p:stCondLst>
+                                  <p:childTnLst>
+                                    <p:set>
+                                      <p:cBhvr>
+                                        <p:cTn id="8" dur="1" fill="hold">
+                                          <p:stCondLst>
+                                            <p:cond delay="0"/>
+                                          </p:stCondLst>
+                                        </p:cTn>
+                                        <p:tgtEl>
+                                          <p:spTgt spid="6"/>
+                                        </p:tgtEl>
+                                        <p:attrNameLst>
+                                          <p:attrName>style.visibility</p:attrName>
+                                        </p:attrNameLst>
+                                      </p:cBhvr>
+                                      <p:to>
+                                        <p:strVal val="visible"/>
+                                      </p:to>
+                                    </p:set>
+                                  </p:childTnLst>
+                                </p:cTn>
+                              </p:par>
+                              <p:par>
+                                <p:cTn id="9" presetID="1" presetClass="entr" presetSubtype="0" fill="hold" grpId="0" nodeType="withEffect">
+                                  <p:stCondLst>
+                                    <p:cond delay="0"/>
+                                  </p:stCondLst>
+                                  <p:childTnLst>
+                                    <p:set>
+                                      <p:cBhvr>
+                                        <p:cTn id="10" dur="1" fill="hold">
+                                          <p:stCondLst>
+                                            <p:cond delay="0"/>
+                                          </p:stCondLst>
+                                        </p:cTn>
+                                        <p:tgtEl>
+                                          <p:spTgt spid="7"/>
+                                        </p:tgtEl>
+                                        <p:attrNameLst>
+                                          <p:attrName>style.visibility</p:attrName>
+                                        </p:attrNameLst>
+                                      </p:cBhvr>
+                                      <p:to>
+                                        <p:strVal val="visible"/>
+                                      </p:to>
+                                    </p:set>
+                                  </p:childTnLst>
+                                </p:cTn>
+                              </p:par>
+                              <p:par>
+                                <p:cTn id="11" presetID="1" presetClass="entr" presetSubtype="0" fill="hold" grpId="0" nodeType="withEffect">
+                                  <p:stCondLst>
+                                    <p:cond delay="0"/>
+                                  </p:stCondLst>
+                                  <p:childTnLst>
+                                    <p:set>
+                                      <p:cBhvr>
+                                        <p:cTn id="12" dur="1" fill="hold">
+                                          <p:stCondLst>
+                                            <p:cond delay="0"/>
+                                          </p:stCondLst>
+                                        </p:cTn>
+                                        <p:tgtEl>
+                                          <p:spTgt spid="8"/>
+                                        </p:tgtEl>
+                                        <p:attrNameLst>
+                                          <p:attrName>style.visibility</p:attrName>
+                                        </p:attrNameLst>
+                                      </p:cBhvr>
+                                      <p:to>
+                                        <p:strVal val="visible"/>
+                                      </p:to>
+                                    </p:set>
+                                  </p:childTnLst>
+                                </p:cTn>
+                              </p:par>
+                              <p:par>
+                                <p:cTn id="13" presetID="1" presetClass="entr" presetSubtype="0" fill="hold" nodeType="withEffect">
+                                  <p:stCondLst>
+                                    <p:cond delay="0"/>
+                                  </p:stCondLst>
+                                  <p:childTnLst>
+                                    <p:set>
+                                      <p:cBhvr>
+                                        <p:cTn id="14" dur="1" fill="hold">
+                                          <p:stCondLst>
+                                            <p:cond delay="0"/>
+                                          </p:stCondLst>
+                                        </p:cTn>
+                                        <p:tgtEl>
+                                          <p:spTgt spid="9"/>
+                                        </p:tgtEl>
+                                        <p:attrNameLst>
+                                          <p:attrName>style.visibility</p:attrName>
+                                        </p:attrNameLst>
+                                      </p:cBhvr>
+                                      <p:to>
+                                        <p:strVal val="visible"/>
+                                      </p:to>
+                                    </p:set>
+                                  </p:childTnLst>
+                                </p:cTn>
+                              </p:par>
+                              <p:par>
+                                <p:cTn id="15" presetID="1" presetClass="entr" presetSubtype="0" fill="hold" nodeType="withEffect">
+                                  <p:stCondLst>
+                                    <p:cond delay="0"/>
+                                  </p:stCondLst>
+                                  <p:childTnLst>
+                                    <p:set>
+                                      <p:cBhvr>
+                                        <p:cTn id="16" dur="1" fill="hold">
+                                          <p:stCondLst>
+                                            <p:cond delay="0"/>
+                                          </p:stCondLst>
+                                        </p:cTn>
+                                        <p:tgtEl>
+                                          <p:spTgt spid="13"/>
+                                        </p:tgtEl>
+                                        <p:attrNameLst>
+                                          <p:attrName>style.visibility</p:attrName>
+                                        </p:attrNameLst>
+                                      </p:cBhvr>
+                                      <p:to>
+                                        <p:strVal val="visible"/>
+                                      </p:to>
+                                    </p:set>
+                                  </p:childTnLst>
+                                </p:cTn>
+                              </p:par>
+                              <p:par>
+                                <p:cTn id="17" presetID="1" presetClass="entr" presetSubtype="0" fill="hold" nodeType="withEffect">
+                                  <p:stCondLst>
+                                    <p:cond delay="0"/>
+                                  </p:stCondLst>
+                                  <p:childTnLst>
+                                    <p:set>
+                                      <p:cBhvr>
+                                        <p:cTn id="18" dur="1" fill="hold">
+                                          <p:stCondLst>
+                                            <p:cond delay="0"/>
+                                          </p:stCondLst>
+                                        </p:cTn>
+                                        <p:tgtEl>
+                                          <p:spTgt spid="36"/>
+                                        </p:tgtEl>
+                                        <p:attrNameLst>
+                                          <p:attrName>style.visibility</p:attrName>
+                                        </p:attrNameLst>
+                                      </p:cBhvr>
+                                      <p:to>
+                                        <p:strVal val="visible"/>
+                                      </p:to>
+                                    </p:set>
+                                  </p:childTnLst>
+                                </p:cTn>
+                              </p:par>
+                              <p:par>
+                                <p:cTn id="19" presetID="1" presetClass="entr" presetSubtype="0" fill="hold" grpId="0" nodeType="withEffect">
+                                  <p:stCondLst>
+                                    <p:cond delay="0"/>
+                                  </p:stCondLst>
+                                  <p:childTnLst>
+                                    <p:set>
+                                      <p:cBhvr>
+                                        <p:cTn id="20" dur="1" fill="hold">
+                                          <p:stCondLst>
+                                            <p:cond delay="0"/>
+                                          </p:stCondLst>
+                                        </p:cTn>
+                                        <p:tgtEl>
+                                          <p:spTgt spid="37"/>
+                                        </p:tgtEl>
+                                        <p:attrNameLst>
+                                          <p:attrName>style.visibility</p:attrName>
+                                        </p:attrNameLst>
+                                      </p:cBhvr>
+                                      <p:to>
+                                        <p:strVal val="visible"/>
+                                      </p:to>
+                                    </p:set>
+                                  </p:childTnLst>
+                                </p:cTn>
+                              </p:par>
+                              <p:par>
+                                <p:cTn id="21" presetID="1" presetClass="entr" presetSubtype="0" fill="hold" nodeType="withEffect">
+                                  <p:stCondLst>
+                                    <p:cond delay="0"/>
+                                  </p:stCondLst>
+                                  <p:childTnLst>
+                                    <p:set>
+                                      <p:cBhvr>
+                                        <p:cTn id="22" dur="1" fill="hold">
+                                          <p:stCondLst>
+                                            <p:cond delay="0"/>
+                                          </p:stCondLst>
+                                        </p:cTn>
+                                        <p:tgtEl>
+                                          <p:spTgt spid="38"/>
+                                        </p:tgtEl>
+                                        <p:attrNameLst>
+                                          <p:attrName>style.visibility</p:attrName>
+                                        </p:attrNameLst>
+                                      </p:cBhvr>
+                                      <p:to>
+                                        <p:strVal val="visible"/>
+                                      </p:to>
+                                    </p:set>
+                                  </p:childTnLst>
+                                </p:cTn>
+                              </p:par>
+                            </p:childTnLst>
+                          </p:cTn>
+                        </p:par>
+                      </p:childTnLst>
+                    </p:cTn>
+                  </p:par>
+                  <p:par>
+                    <p:cTn id="23" fill="hold">
+                      <p:stCondLst>
+                        <p:cond delay="indefinite"/>
+                      </p:stCondLst>
+                      <p:childTnLst>
+                        <p:par>
+                          <p:cTn id="24" fill="hold">
+                            <p:stCondLst>
+                              <p:cond delay="0"/>
+                            </p:stCondLst>
+                            <p:childTnLst>
+                              <p:par>
+                                <p:cTn id="25" presetID="1" presetClass="entr" presetSubtype="0" fill="hold" nodeType="clickEffect">
+                                  <p:stCondLst>
+                                    <p:cond delay="0"/>
+                                  </p:stCondLst>
+                                  <p:childTnLst>
+                                    <p:set>
+                                      <p:cBhvr>
+                                        <p:cTn id="26" dur="1" fill="hold">
+                                          <p:stCondLst>
+                                            <p:cond delay="0"/>
+                                          </p:stCondLst>
+                                        </p:cTn>
+                                        <p:tgtEl>
+                                          <p:spTgt spid="3">
+                                            <p:txEl>
+                                              <p:pRg st="2" end="2"/>
+                                            </p:txEl>
+                                          </p:spTgt>
+                                        </p:tgtEl>
+                                        <p:attrNameLst>
+                                          <p:attrName>style.visibility</p:attrName>
+                                        </p:attrNameLst>
+                                      </p:cBhvr>
+                                      <p:to>
+                                        <p:strVal val="visible"/>
+                                      </p:to>
+                                    </p:set>
+                                  </p:childTnLst>
+                                </p:cTn>
+                              </p:par>
+                              <p:par>
+                                <p:cTn id="27" presetID="1" presetClass="entr" presetSubtype="0" fill="hold" nodeType="withEffect">
+                                  <p:stCondLst>
+                                    <p:cond delay="0"/>
+                                  </p:stCondLst>
+                                  <p:childTnLst>
+                                    <p:set>
+                                      <p:cBhvr>
+                                        <p:cTn id="28" dur="1" fill="hold">
+                                          <p:stCondLst>
+                                            <p:cond delay="0"/>
+                                          </p:stCondLst>
+                                        </p:cTn>
+                                        <p:tgtEl>
+                                          <p:spTgt spid="42"/>
+                                        </p:tgtEl>
+                                        <p:attrNameLst>
+                                          <p:attrName>style.visibility</p:attrName>
+                                        </p:attrNameLst>
+                                      </p:cBhvr>
+                                      <p:to>
+                                        <p:strVal val="visible"/>
+                                      </p:to>
+                                    </p:set>
+                                  </p:childTnLst>
+                                </p:cTn>
+                              </p:par>
+                              <p:par>
+                                <p:cTn id="29" presetID="1" presetClass="entr" presetSubtype="0" fill="hold" grpId="0" nodeType="withEffect">
+                                  <p:stCondLst>
+                                    <p:cond delay="0"/>
+                                  </p:stCondLst>
+                                  <p:childTnLst>
+                                    <p:set>
+                                      <p:cBhvr>
+                                        <p:cTn id="30" dur="1" fill="hold">
+                                          <p:stCondLst>
+                                            <p:cond delay="0"/>
+                                          </p:stCondLst>
+                                        </p:cTn>
+                                        <p:tgtEl>
+                                          <p:spTgt spid="43"/>
+                                        </p:tgtEl>
+                                        <p:attrNameLst>
+                                          <p:attrName>style.visibility</p:attrName>
+                                        </p:attrNameLst>
+                                      </p:cBhvr>
+                                      <p:to>
+                                        <p:strVal val="visible"/>
+                                      </p:to>
+                                    </p:set>
+                                  </p:childTnLst>
+                                </p:cTn>
+                              </p:par>
+                              <p:par>
+                                <p:cTn id="31" presetID="1" presetClass="entr" presetSubtype="0" fill="hold" grpId="0" nodeType="withEffect">
+                                  <p:stCondLst>
+                                    <p:cond delay="0"/>
+                                  </p:stCondLst>
+                                  <p:childTnLst>
+                                    <p:set>
+                                      <p:cBhvr>
+                                        <p:cTn id="32" dur="1" fill="hold">
+                                          <p:stCondLst>
+                                            <p:cond delay="0"/>
+                                          </p:stCondLst>
+                                        </p:cTn>
+                                        <p:tgtEl>
+                                          <p:spTgt spid="44"/>
+                                        </p:tgtEl>
+                                        <p:attrNameLst>
+                                          <p:attrName>style.visibility</p:attrName>
+                                        </p:attrNameLst>
+                                      </p:cBhvr>
+                                      <p:to>
+                                        <p:strVal val="visible"/>
+                                      </p:to>
+                                    </p:set>
+                                  </p:childTnLst>
+                                </p:cTn>
+                              </p:par>
+                              <p:par>
+                                <p:cTn id="33" presetID="1" presetClass="entr" presetSubtype="0" fill="hold" grpId="0" nodeType="withEffect">
+                                  <p:stCondLst>
+                                    <p:cond delay="0"/>
+                                  </p:stCondLst>
+                                  <p:childTnLst>
+                                    <p:set>
+                                      <p:cBhvr>
+                                        <p:cTn id="34" dur="1" fill="hold">
+                                          <p:stCondLst>
+                                            <p:cond delay="0"/>
+                                          </p:stCondLst>
+                                        </p:cTn>
+                                        <p:tgtEl>
+                                          <p:spTgt spid="45"/>
+                                        </p:tgtEl>
+                                        <p:attrNameLst>
+                                          <p:attrName>style.visibility</p:attrName>
+                                        </p:attrNameLst>
+                                      </p:cBhvr>
+                                      <p:to>
+                                        <p:strVal val="visible"/>
+                                      </p:to>
+                                    </p:set>
+                                  </p:childTnLst>
+                                </p:cTn>
+                              </p:par>
+                              <p:par>
+                                <p:cTn id="35" presetID="1" presetClass="entr" presetSubtype="0" fill="hold" grpId="0" nodeType="withEffect">
+                                  <p:stCondLst>
+                                    <p:cond delay="0"/>
+                                  </p:stCondLst>
+                                  <p:childTnLst>
+                                    <p:set>
+                                      <p:cBhvr>
+                                        <p:cTn id="36" dur="1" fill="hold">
+                                          <p:stCondLst>
+                                            <p:cond delay="0"/>
+                                          </p:stCondLst>
+                                        </p:cTn>
+                                        <p:tgtEl>
+                                          <p:spTgt spid="46"/>
+                                        </p:tgtEl>
+                                        <p:attrNameLst>
+                                          <p:attrName>style.visibility</p:attrName>
+                                        </p:attrNameLst>
+                                      </p:cBhvr>
+                                      <p:to>
+                                        <p:strVal val="visible"/>
+                                      </p:to>
+                                    </p:set>
+                                  </p:childTnLst>
+                                </p:cTn>
+                              </p:par>
+                            </p:childTnLst>
+                          </p:cTn>
+                        </p:par>
+                      </p:childTnLst>
+                    </p:cTn>
+                  </p:par>
+                </p:childTnLst>
+              </p:cTn>
+              <p:prevCondLst>
+                <p:cond evt="onPrev" delay="0">
+                  <p:tgtEl>
+                    <p:sldTgt/>
+                  </p:tgtEl>
+                </p:cond>
+              </p:prevCondLst>
+              <p:nextCondLst>
+                <p:cond evt="onNext" delay="0">
+                  <p:tgtEl>
+                    <p:sldTgt/>
+                  </p:tgtEl>
+                </p:cond>
+              </p:nextCondLst>
+            </p:seq>
+          </p:childTnLst>
+        </p:cTn>
+      </p:par>
+    </p:tnLst>
+    <p:bldLst>
+      <p:bldP spid="6" grpId="0" animBg="1"/>
+      <p:bldP spid="7" grpId="0" animBg="1"/>
+      <p:bldP spid="8" grpId="0" animBg="1"/>
+      <p:bldP spid="37" grpId="0" animBg="1"/>
+      <p:bldP spid="43" grpId="0" animBg="1"/>
+      <p:bldP spid="44" grpId="0" animBg="1"/>
+      <p:bldP spid="45" grpId="0" animBg="1"/>
+      <p:bldP spid="46" grpId="0" animBg="1"/>
+    </p:bldLst>
+  </p:timing>
 </p:sld>
 </file>
 
@@ -6643,8 +7234,8 @@
         </p:nvSpPr>
         <p:spPr>
           <a:xfrm>
-            <a:off x="838200" y="1825625"/>
-            <a:ext cx="6768402" cy="4351338"/>
+            <a:off x="838200" y="1690688"/>
+            <a:ext cx="10081816" cy="4351338"/>
           </a:xfrm>
         </p:spPr>
         <p:txBody>
@@ -6695,8 +7286,8 @@
         </p:blipFill>
         <p:spPr>
           <a:xfrm>
-            <a:off x="838200" y="3218857"/>
-            <a:ext cx="5507892" cy="3639143"/>
+            <a:off x="1062642" y="3016251"/>
+            <a:ext cx="4681362" cy="3093043"/>
           </a:xfrm>
           <a:prstGeom prst="rect">
             <a:avLst/>
@@ -6727,7 +7318,7 @@
         </p:nvSpPr>
         <p:spPr>
           <a:xfrm>
-            <a:off x="6712298" y="2551890"/>
+            <a:off x="6447998" y="2482442"/>
             <a:ext cx="2261104" cy="841248"/>
           </a:xfrm>
           <a:prstGeom prst="roundRect">
@@ -6783,7 +7374,7 @@
         </p:nvSpPr>
         <p:spPr>
           <a:xfrm>
-            <a:off x="6712298" y="3702826"/>
+            <a:off x="6447998" y="3633378"/>
             <a:ext cx="2261104" cy="841248"/>
           </a:xfrm>
           <a:prstGeom prst="roundRect">
@@ -6844,7 +7435,7 @@
         </p:nvSpPr>
         <p:spPr>
           <a:xfrm>
-            <a:off x="10177858" y="3702826"/>
+            <a:off x="9913558" y="3633378"/>
             <a:ext cx="1953852" cy="841248"/>
           </a:xfrm>
           <a:prstGeom prst="roundRect">
@@ -6904,7 +7495,7 @@
         </p:nvCxnSpPr>
         <p:spPr>
           <a:xfrm>
-            <a:off x="8973402" y="4123450"/>
+            <a:off x="8709102" y="4054002"/>
             <a:ext cx="1204456" cy="0"/>
           </a:xfrm>
           <a:prstGeom prst="straightConnector1">
@@ -6948,7 +7539,7 @@
         </p:nvCxnSpPr>
         <p:spPr>
           <a:xfrm>
-            <a:off x="7842850" y="3393138"/>
+            <a:off x="7578550" y="3323690"/>
             <a:ext cx="0" cy="309688"/>
           </a:xfrm>
           <a:prstGeom prst="straightConnector1">
@@ -6988,7 +7579,7 @@
         </p:nvGrpSpPr>
         <p:grpSpPr>
           <a:xfrm>
-            <a:off x="8510954" y="3282189"/>
+            <a:off x="8246654" y="3212741"/>
             <a:ext cx="2080009" cy="841248"/>
             <a:chOff x="8440548" y="4177136"/>
             <a:chExt cx="2246560" cy="841248"/>
@@ -7107,7 +7698,7 @@
         </p:nvSpPr>
         <p:spPr>
           <a:xfrm>
-            <a:off x="6712298" y="5479622"/>
+            <a:off x="6447998" y="5410174"/>
             <a:ext cx="2733427" cy="841248"/>
           </a:xfrm>
           <a:prstGeom prst="roundRect">
@@ -7167,7 +7758,7 @@
         </p:nvCxnSpPr>
         <p:spPr>
           <a:xfrm>
-            <a:off x="7842850" y="4544074"/>
+            <a:off x="7578550" y="4474626"/>
             <a:ext cx="236162" cy="935548"/>
           </a:xfrm>
           <a:prstGeom prst="straightConnector1">
@@ -7207,7 +7798,7 @@
         </p:nvSpPr>
         <p:spPr>
           <a:xfrm>
-            <a:off x="7606602" y="4853762"/>
+            <a:off x="7342302" y="4784314"/>
             <a:ext cx="732134" cy="369332"/>
           </a:xfrm>
           <a:prstGeom prst="rect">
@@ -7250,7 +7841,7 @@
         </p:nvSpPr>
         <p:spPr>
           <a:xfrm>
-            <a:off x="9187601" y="3983247"/>
+            <a:off x="8923301" y="3913799"/>
             <a:ext cx="732134" cy="369332"/>
           </a:xfrm>
           <a:prstGeom prst="rect">
@@ -7289,6 +7880,81 @@
   <p:clrMapOvr>
     <a:masterClrMapping/>
   </p:clrMapOvr>
+  <p:timing>
+    <p:tnLst>
+      <p:par>
+        <p:cTn id="1" dur="indefinite" restart="never" nodeType="tmRoot">
+          <p:childTnLst>
+            <p:seq concurrent="1" nextAc="seek">
+              <p:cTn id="2" dur="indefinite" nodeType="mainSeq">
+                <p:childTnLst>
+                  <p:par>
+                    <p:cTn id="3" fill="hold">
+                      <p:stCondLst>
+                        <p:cond delay="indefinite"/>
+                      </p:stCondLst>
+                      <p:childTnLst>
+                        <p:par>
+                          <p:cTn id="4" fill="hold">
+                            <p:stCondLst>
+                              <p:cond delay="0"/>
+                            </p:stCondLst>
+                            <p:childTnLst>
+                              <p:par>
+                                <p:cTn id="5" presetID="1" presetClass="entr" presetSubtype="0" fill="hold" nodeType="clickEffect">
+                                  <p:stCondLst>
+                                    <p:cond delay="0"/>
+                                  </p:stCondLst>
+                                  <p:childTnLst>
+                                    <p:set>
+                                      <p:cBhvr>
+                                        <p:cTn id="6" dur="1" fill="hold">
+                                          <p:stCondLst>
+                                            <p:cond delay="0"/>
+                                          </p:stCondLst>
+                                        </p:cTn>
+                                        <p:tgtEl>
+                                          <p:spTgt spid="5"/>
+                                        </p:tgtEl>
+                                        <p:attrNameLst>
+                                          <p:attrName>style.visibility</p:attrName>
+                                        </p:attrNameLst>
+                                      </p:cBhvr>
+                                      <p:to>
+                                        <p:strVal val="visible"/>
+                                      </p:to>
+                                    </p:set>
+                                  </p:childTnLst>
+                                </p:cTn>
+                              </p:par>
+                            </p:childTnLst>
+                          </p:cTn>
+                        </p:par>
+                      </p:childTnLst>
+                    </p:cTn>
+                  </p:par>
+                </p:childTnLst>
+              </p:cTn>
+              <p:prevCondLst>
+                <p:cond evt="onPrev" delay="0">
+                  <p:tgtEl>
+                    <p:sldTgt/>
+                  </p:tgtEl>
+                </p:cond>
+              </p:prevCondLst>
+              <p:nextCondLst>
+                <p:cond evt="onNext" delay="0">
+                  <p:tgtEl>
+                    <p:sldTgt/>
+                  </p:tgtEl>
+                </p:cond>
+              </p:nextCondLst>
+            </p:seq>
+          </p:childTnLst>
+        </p:cTn>
+      </p:par>
+    </p:tnLst>
+  </p:timing>
 </p:sld>
 </file>
 
@@ -7513,6 +8179,112 @@
   <p:clrMapOvr>
     <a:masterClrMapping/>
   </p:clrMapOvr>
+  <p:timing>
+    <p:tnLst>
+      <p:par>
+        <p:cTn id="1" dur="indefinite" restart="never" nodeType="tmRoot">
+          <p:childTnLst>
+            <p:seq concurrent="1" nextAc="seek">
+              <p:cTn id="2" dur="indefinite" nodeType="mainSeq">
+                <p:childTnLst>
+                  <p:par>
+                    <p:cTn id="3" fill="hold">
+                      <p:stCondLst>
+                        <p:cond delay="indefinite"/>
+                      </p:stCondLst>
+                      <p:childTnLst>
+                        <p:par>
+                          <p:cTn id="4" fill="hold">
+                            <p:stCondLst>
+                              <p:cond delay="0"/>
+                            </p:stCondLst>
+                            <p:childTnLst>
+                              <p:par>
+                                <p:cTn id="5" presetID="1" presetClass="entr" presetSubtype="0" fill="hold" nodeType="clickEffect">
+                                  <p:stCondLst>
+                                    <p:cond delay="0"/>
+                                  </p:stCondLst>
+                                  <p:childTnLst>
+                                    <p:set>
+                                      <p:cBhvr>
+                                        <p:cTn id="6" dur="1" fill="hold">
+                                          <p:stCondLst>
+                                            <p:cond delay="0"/>
+                                          </p:stCondLst>
+                                        </p:cTn>
+                                        <p:tgtEl>
+                                          <p:spTgt spid="3">
+                                            <p:txEl>
+                                              <p:pRg st="5" end="5"/>
+                                            </p:txEl>
+                                          </p:spTgt>
+                                        </p:tgtEl>
+                                        <p:attrNameLst>
+                                          <p:attrName>style.visibility</p:attrName>
+                                        </p:attrNameLst>
+                                      </p:cBhvr>
+                                      <p:to>
+                                        <p:strVal val="visible"/>
+                                      </p:to>
+                                    </p:set>
+                                  </p:childTnLst>
+                                </p:cTn>
+                              </p:par>
+                              <p:par>
+                                <p:cTn id="7" presetID="1" presetClass="entr" presetSubtype="0" fill="hold" nodeType="withEffect">
+                                  <p:stCondLst>
+                                    <p:cond delay="0"/>
+                                  </p:stCondLst>
+                                  <p:childTnLst>
+                                    <p:set>
+                                      <p:cBhvr>
+                                        <p:cTn id="8" dur="1" fill="hold">
+                                          <p:stCondLst>
+                                            <p:cond delay="0"/>
+                                          </p:stCondLst>
+                                        </p:cTn>
+                                        <p:tgtEl>
+                                          <p:spTgt spid="7"/>
+                                        </p:tgtEl>
+                                        <p:attrNameLst>
+                                          <p:attrName>style.visibility</p:attrName>
+                                        </p:attrNameLst>
+                                      </p:cBhvr>
+                                      <p:to>
+                                        <p:strVal val="visible"/>
+                                      </p:to>
+                                    </p:set>
+                                  </p:childTnLst>
+                                </p:cTn>
+                              </p:par>
+                            </p:childTnLst>
+                          </p:cTn>
+                        </p:par>
+                      </p:childTnLst>
+                    </p:cTn>
+                  </p:par>
+                </p:childTnLst>
+              </p:cTn>
+              <p:prevCondLst>
+                <p:cond evt="onPrev" delay="0">
+                  <p:tgtEl>
+                    <p:sldTgt/>
+                  </p:tgtEl>
+                </p:cond>
+              </p:prevCondLst>
+              <p:nextCondLst>
+                <p:cond evt="onNext" delay="0">
+                  <p:tgtEl>
+                    <p:sldTgt/>
+                  </p:tgtEl>
+                </p:cond>
+              </p:nextCondLst>
+            </p:seq>
+          </p:childTnLst>
+        </p:cTn>
+      </p:par>
+    </p:tnLst>
+  </p:timing>
 </p:sld>
 </file>
 
@@ -7597,7 +8369,7 @@
         </p:blipFill>
         <p:spPr>
           <a:xfrm>
-            <a:off x="4197615" y="2889503"/>
+            <a:off x="4285747" y="2588561"/>
             <a:ext cx="3620505" cy="3360421"/>
           </a:xfrm>
           <a:prstGeom prst="rect">
@@ -7619,7 +8391,7 @@
         </p:nvSpPr>
         <p:spPr>
           <a:xfrm>
-            <a:off x="4142751" y="6395915"/>
+            <a:off x="4142751" y="6072441"/>
             <a:ext cx="5267981" cy="276999"/>
           </a:xfrm>
           <a:prstGeom prst="rect">
